--- a/deck/LiveWell-Lab-Flow.pptx
+++ b/deck/LiveWell-Lab-Flow.pptx
@@ -1499,7 +1499,7 @@
           <a:lstStyle/>
           <a:p>
             <a:r>
-              <a:t>Lab 0: Setup &amp; first agent. Objective, read from the lab page: A Foundry agent is a model plus instructions, and instructions alone can make it safe; the router picks a model per request. Walk the steps on the left; the screenshot shows what success looks like. Close by reading the 'You learned' line aloud: that a Foundry agent starts as model + instructions, and that the router picks a model per request, which you can see under each answer in the model-router playground.</a:t>
+              <a:t>Lab 0: Setup &amp; first agent. Objective, read from the lab page: A Foundry agent is a model plus instructions, and instructions alone can make it safe; every answer leaves a trace you can inspect. Walk the steps on the left; the screenshot shows what success looks like. Close by reading the 'You learned' line aloud: that a Foundry agent starts as model + instructions, and that every answer leaves a trace with the model, the instructions and the token counts.</a:t>
             </a:r>
           </a:p>
         </p:txBody>
@@ -1709,7 +1709,7 @@
           <a:lstStyle/>
           <a:p>
             <a:r>
-              <a:t>These are the expected outcomes from the Lab 2 page; confirm them live because content-safety severity is probabilistic. Left column is the platform default guardrail, right is the shared custom policy plus the safety instruction block. Point out three things: Prompt Shields catches the injected flyer in both; the custom policy turns two answers into blocks; and the benign dose reminder is the price of a stricter blocklist. Facilitator demo: demos/guardrail-matrix.py runs the same seven prompts on gpt-4.1-mini and model-router, with and without the custom guardrail, and can push the rows into a Foundry evaluation for a side-by-side compare.</a:t>
+              <a:t>These are the expected outcomes from the Lab 2 page; confirm them live because content-safety severity is probabilistic. Left column is the platform default guardrail, right is the shared custom policy plus the safety instruction block. Point out three things: Prompt Shields catches the injected flyer in both; the custom policy turns two answers into blocks; and the benign dose reminder is the price of a stricter blocklist. Facilitator demo: demos/guardrail-matrix.py runs the same seven prompts on gpt-5-mini and gpt-4.1-mini, with and without the custom guardrail, and can push the rows into a Foundry evaluation for a side-by-side compare.</a:t>
             </a:r>
           </a:p>
         </p:txBody>
@@ -6080,7 +6080,25 @@
                 </a:solidFill>
                 <a:latin typeface="Segoe UI"/>
               </a:rPr>
-              <a:t>Add the OpenAPI tool </a:t>
+              <a:t>Switch the model to </a:t>
+            </a:r>
+            <a:r>
+              <a:rPr sz="1080" i="0" b="0">
+                <a:solidFill>
+                  <a:srgbClr val="0B2E59"/>
+                </a:solidFill>
+                <a:latin typeface="Consolas"/>
+              </a:rPr>
+              <a:t>gpt-4.1-mini</a:t>
+            </a:r>
+            <a:r>
+              <a:rPr sz="1080" i="0" b="0">
+                <a:solidFill>
+                  <a:srgbClr val="333333"/>
+                </a:solidFill>
+                <a:latin typeface="Segoe UI"/>
+              </a:rPr>
+              <a:t>, then add the OpenAPI tool </a:t>
             </a:r>
             <a:r>
               <a:rPr sz="1080" i="0" b="0">
@@ -6358,25 +6376,7 @@
                 </a:solidFill>
                 <a:latin typeface="Segoe UI"/>
               </a:rPr>
-              <a:t> (preview), switch the model to </a:t>
-            </a:r>
-            <a:r>
-              <a:rPr sz="1080" i="0" b="0">
-                <a:solidFill>
-                  <a:srgbClr val="0B2E59"/>
-                </a:solidFill>
-                <a:latin typeface="Consolas"/>
-              </a:rPr>
-              <a:t>gpt-5.4-mini</a:t>
-            </a:r>
-            <a:r>
-              <a:rPr sz="1080" i="0" b="0">
-                <a:solidFill>
-                  <a:srgbClr val="333333"/>
-                </a:solidFill>
-                <a:latin typeface="Segoe UI"/>
-              </a:rPr>
-              <a:t> and append the </a:t>
+              <a:t> (preview) and append the </a:t>
             </a:r>
             <a:r>
               <a:rPr sz="1080" i="0" b="0">
@@ -13210,7 +13210,7 @@
                           </a:solidFill>
                           <a:latin typeface="Segoe UI"/>
                         </a:rPr>
-                        <a:t>A Foundry agent is a model plus instructions, and instructions alone can make it safe; the router picks a model per request</a:t>
+                        <a:t>A Foundry agent is a model plus instructions, and instructions alone can make it safe; every answer leaves a trace you can inspect</a:t>
                       </a:r>
                     </a:p>
                   </a:txBody>
@@ -13240,7 +13240,7 @@
                           </a:solidFill>
                           <a:latin typeface="Segoe UI"/>
                         </a:rPr>
-                        <a:t>A Foundry agent starts as model + instructions, and that the router picks a model per request, which you can see under each answer in the model-router playground.</a:t>
+                        <a:t>A Foundry agent starts as model + instructions, and that every answer leaves a trace with the model, the instructions and the token counts.</a:t>
                       </a:r>
                     </a:p>
                   </a:txBody>
@@ -17400,22 +17400,6 @@
                 </a:solidFill>
                 <a:latin typeface="Consolas"/>
               </a:rPr>
-              <a:t>demos/router-picks.py</a:t>
-            </a:r>
-          </a:p>
-          <a:p>
-            <a:pPr algn="l">
-              <a:spcAft>
-                <a:spcPts val="400"/>
-              </a:spcAft>
-            </a:pPr>
-            <a:r>
-              <a:rPr sz="1250" i="0" b="0">
-                <a:solidFill>
-                  <a:srgbClr val="0B2E59"/>
-                </a:solidFill>
-                <a:latin typeface="Consolas"/>
-              </a:rPr>
               <a:t>demos/guardrail-matrix.py</a:t>
             </a:r>
           </a:p>
@@ -18972,7 +18956,7 @@
                 </a:solidFill>
                 <a:latin typeface="Segoe UI"/>
               </a:rPr>
-              <a:t>model-router picks a model per request</a:t>
+              <a:t>every answer leaves a trace</a:t>
             </a:r>
           </a:p>
         </p:txBody>
@@ -21506,10 +21490,37 @@
             <a:r>
               <a:rPr sz="1150" i="0" b="0">
                 <a:solidFill>
+                  <a:srgbClr val="333333"/>
+                </a:solidFill>
+                <a:latin typeface="Segoe UI"/>
+              </a:rPr>
+              <a:t>Coach on </a:t>
+            </a:r>
+            <a:r>
+              <a:rPr sz="1150" i="0" b="0">
+                <a:solidFill>
                   <a:srgbClr val="0B2E59"/>
                 </a:solidFill>
                 <a:latin typeface="Consolas"/>
               </a:rPr>
+              <a:t>gpt-4.1-mini</a:t>
+            </a:r>
+            <a:r>
+              <a:rPr sz="1150" i="0" b="0">
+                <a:solidFill>
+                  <a:srgbClr val="333333"/>
+                </a:solidFill>
+                <a:latin typeface="Segoe UI"/>
+              </a:rPr>
+              <a:t>; </a:t>
+            </a:r>
+            <a:r>
+              <a:rPr sz="1150" i="0" b="0">
+                <a:solidFill>
+                  <a:srgbClr val="0B2E59"/>
+                </a:solidFill>
+                <a:latin typeface="Consolas"/>
+              </a:rPr>
               <a:t>livewell_profile</a:t>
             </a:r>
             <a:r>
@@ -21537,25 +21548,7 @@
                 </a:solidFill>
                 <a:latin typeface="Segoe UI"/>
               </a:rPr>
-              <a:t> with approval, memory on </a:t>
-            </a:r>
-            <a:r>
-              <a:rPr sz="1150" i="0" b="0">
-                <a:solidFill>
-                  <a:srgbClr val="0B2E59"/>
-                </a:solidFill>
-                <a:latin typeface="Consolas"/>
-              </a:rPr>
-              <a:t>gpt-5.4-mini</a:t>
-            </a:r>
-            <a:r>
-              <a:rPr sz="1150" i="0" b="0">
-                <a:solidFill>
-                  <a:srgbClr val="333333"/>
-                </a:solidFill>
-                <a:latin typeface="Segoe UI"/>
-              </a:rPr>
-              <a:t>; </a:t>
+              <a:t> with approval, memory; </a:t>
             </a:r>
             <a:r>
               <a:rPr sz="1150" i="0" b="0">
@@ -21732,25 +21725,7 @@
                 </a:solidFill>
                 <a:latin typeface="Segoe UI"/>
               </a:rPr>
-              <a:t> evaluations; version </a:t>
-            </a:r>
-            <a:r>
-              <a:rPr sz="1150" i="0" b="0">
-                <a:solidFill>
-                  <a:srgbClr val="0B2E59"/>
-                </a:solidFill>
-                <a:latin typeface="Consolas"/>
-              </a:rPr>
-              <a:t>v2-guarded</a:t>
-            </a:r>
-            <a:r>
-              <a:rPr sz="1150" i="0" b="0">
-                <a:solidFill>
-                  <a:srgbClr val="333333"/>
-                </a:solidFill>
-                <a:latin typeface="Segoe UI"/>
-              </a:rPr>
-              <a:t>.</a:t>
+              <a:t> evaluations; baseline vs guarded version.</a:t>
             </a:r>
           </a:p>
         </p:txBody>
@@ -22014,7 +21989,7 @@
                 </a:solidFill>
                 <a:latin typeface="Consolas"/>
               </a:rPr>
-              <a:t>model-router</a:t>
+              <a:t>gpt-5-mini</a:t>
             </a:r>
             <a:r>
               <a:rPr sz="1150" i="0" b="0">
@@ -25385,7 +25360,7 @@
                 </a:solidFill>
                 <a:latin typeface="Segoe UI"/>
               </a:rPr>
-              <a:t>A Foundry agent is a model plus instructions, and instructions alone can make it safe; the router picks a model per request.</a:t>
+              <a:t>A Foundry agent is a model plus instructions, and instructions alone can make it safe; every answer leaves a trace you can inspect.</a:t>
             </a:r>
           </a:p>
         </p:txBody>
@@ -25725,7 +25700,7 @@
                 </a:solidFill>
                 <a:latin typeface="Consolas"/>
               </a:rPr>
-              <a:t>model-router</a:t>
+              <a:t>gpt-5-mini</a:t>
             </a:r>
             <a:r>
               <a:rPr sz="1080" i="0" b="0">
@@ -25734,25 +25709,7 @@
                 </a:solidFill>
                 <a:latin typeface="Segoe UI"/>
               </a:rPr>
-              <a:t> (fallback </a:t>
-            </a:r>
-            <a:r>
-              <a:rPr sz="1080" i="0" b="0">
-                <a:solidFill>
-                  <a:srgbClr val="0B2E59"/>
-                </a:solidFill>
-                <a:latin typeface="Consolas"/>
-              </a:rPr>
-              <a:t>gpt-4.1-mini</a:t>
-            </a:r>
-            <a:r>
-              <a:rPr sz="1080" i="0" b="0">
-                <a:solidFill>
-                  <a:srgbClr val="333333"/>
-                </a:solidFill>
-                <a:latin typeface="Segoe UI"/>
-              </a:rPr>
-              <a:t>).</a:t>
+              <a:t>.</a:t>
             </a:r>
           </a:p>
         </p:txBody>
@@ -25840,22 +25797,49 @@
               </a:spcAft>
             </a:pPr>
             <a:r>
+              <a:rPr sz="1080" i="0" b="1">
+                <a:solidFill>
+                  <a:srgbClr val="333333"/>
+                </a:solidFill>
+                <a:latin typeface="Segoe UI"/>
+              </a:rPr>
+              <a:t>Parameters</a:t>
+            </a:r>
+            <a:r>
               <a:rPr sz="1080" i="0" b="0">
                 <a:solidFill>
                   <a:srgbClr val="333333"/>
                 </a:solidFill>
                 <a:latin typeface="Segoe UI"/>
               </a:rPr>
-              <a:t>Paste the </a:t>
+              <a:t>: Reasoning effort </a:t>
+            </a:r>
+            <a:r>
+              <a:rPr sz="1080" i="0" b="1">
+                <a:solidFill>
+                  <a:srgbClr val="333333"/>
+                </a:solidFill>
+                <a:latin typeface="Segoe UI"/>
+              </a:rPr>
+              <a:t>Low</a:t>
             </a:r>
             <a:r>
               <a:rPr sz="1080" i="0" b="0">
                 <a:solidFill>
-                  <a:srgbClr val="0B2E59"/>
-                </a:solidFill>
-                <a:latin typeface="Consolas"/>
-              </a:rPr>
-              <a:t>base</a:t>
+                  <a:srgbClr val="333333"/>
+                </a:solidFill>
+                <a:latin typeface="Segoe UI"/>
+              </a:rPr>
+              <a:t>; remove </a:t>
+            </a:r>
+            <a:r>
+              <a:rPr sz="1080" i="0" b="1">
+                <a:solidFill>
+                  <a:srgbClr val="333333"/>
+                </a:solidFill>
+                <a:latin typeface="Segoe UI"/>
+              </a:rPr>
+              <a:t>Web search</a:t>
             </a:r>
             <a:r>
               <a:rPr sz="1080" i="0" b="0">
@@ -25864,25 +25848,7 @@
                 </a:solidFill>
                 <a:latin typeface="Segoe UI"/>
               </a:rPr>
-              <a:t> instruction block, then </a:t>
-            </a:r>
-            <a:r>
-              <a:rPr sz="1080" i="0" b="1">
-                <a:solidFill>
-                  <a:srgbClr val="333333"/>
-                </a:solidFill>
-                <a:latin typeface="Segoe UI"/>
-              </a:rPr>
-              <a:t>Save</a:t>
-            </a:r>
-            <a:r>
-              <a:rPr sz="1080" i="0" b="0">
-                <a:solidFill>
-                  <a:srgbClr val="333333"/>
-                </a:solidFill>
-                <a:latin typeface="Segoe UI"/>
-              </a:rPr>
-              <a:t> and note the version.</a:t>
+              <a:t> if the template added it.</a:t>
             </a:r>
           </a:p>
         </p:txBody>
@@ -25976,7 +25942,7 @@
                 </a:solidFill>
                 <a:latin typeface="Segoe UI"/>
               </a:rPr>
-              <a:t>Send </a:t>
+              <a:t>Paste the </a:t>
             </a:r>
             <a:r>
               <a:rPr sz="1080" i="0" b="0">
@@ -25985,7 +25951,7 @@
                 </a:solidFill>
                 <a:latin typeface="Consolas"/>
               </a:rPr>
-              <a:t>lab0_hi</a:t>
+              <a:t>base</a:t>
             </a:r>
             <a:r>
               <a:rPr sz="1080" i="0" b="0">
@@ -25994,25 +25960,25 @@
                 </a:solidFill>
                 <a:latin typeface="Segoe UI"/>
               </a:rPr>
-              <a:t> and </a:t>
+              <a:t> instruction block, then </a:t>
+            </a:r>
+            <a:r>
+              <a:rPr sz="1080" i="0" b="1">
+                <a:solidFill>
+                  <a:srgbClr val="333333"/>
+                </a:solidFill>
+                <a:latin typeface="Segoe UI"/>
+              </a:rPr>
+              <a:t>Save</a:t>
             </a:r>
             <a:r>
               <a:rPr sz="1080" i="0" b="0">
                 <a:solidFill>
-                  <a:srgbClr val="0B2E59"/>
-                </a:solidFill>
-                <a:latin typeface="Consolas"/>
-              </a:rPr>
-              <a:t>lab0_am_i_diabetic</a:t>
-            </a:r>
-            <a:r>
-              <a:rPr sz="1080" i="0" b="0">
-                <a:solidFill>
                   <a:srgbClr val="333333"/>
                 </a:solidFill>
                 <a:latin typeface="Segoe UI"/>
               </a:rPr>
-              <a:t>: it introduces itself and refuses to diagnose.</a:t>
+              <a:t> and note the version.</a:t>
             </a:r>
           </a:p>
         </p:txBody>
@@ -26115,7 +26081,7 @@
                 </a:solidFill>
                 <a:latin typeface="Consolas"/>
               </a:rPr>
-              <a:t>lab0_router_compare</a:t>
+              <a:t>lab0_hi</a:t>
             </a:r>
             <a:r>
               <a:rPr sz="1080" i="0" b="0">
@@ -26124,7 +26090,7 @@
                 </a:solidFill>
                 <a:latin typeface="Segoe UI"/>
               </a:rPr>
-              <a:t> on </a:t>
+              <a:t> and </a:t>
             </a:r>
             <a:r>
               <a:rPr sz="1080" i="0" b="0">
@@ -26133,7 +26099,7 @@
                 </a:solidFill>
                 <a:latin typeface="Consolas"/>
               </a:rPr>
-              <a:t>model-router</a:t>
+              <a:t>lab0_am_i_diabetic</a:t>
             </a:r>
             <a:r>
               <a:rPr sz="1080" i="0" b="0">
@@ -26142,25 +26108,7 @@
                 </a:solidFill>
                 <a:latin typeface="Segoe UI"/>
               </a:rPr>
-              <a:t>, then again on </a:t>
-            </a:r>
-            <a:r>
-              <a:rPr sz="1080" i="0" b="0">
-                <a:solidFill>
-                  <a:srgbClr val="0B2E59"/>
-                </a:solidFill>
-                <a:latin typeface="Consolas"/>
-              </a:rPr>
-              <a:t>gpt-4.1-mini</a:t>
-            </a:r>
-            <a:r>
-              <a:rPr sz="1080" i="0" b="0">
-                <a:solidFill>
-                  <a:srgbClr val="333333"/>
-                </a:solidFill>
-                <a:latin typeface="Segoe UI"/>
-              </a:rPr>
-              <a:t>.</a:t>
+              <a:t>: it introduces itself and refuses to diagnose.</a:t>
             </a:r>
           </a:p>
         </p:txBody>
@@ -26254,25 +26202,25 @@
                 </a:solidFill>
                 <a:latin typeface="Segoe UI"/>
               </a:rPr>
-              <a:t>Open the </a:t>
-            </a:r>
-            <a:r>
-              <a:rPr sz="1080" i="0" b="1">
+              <a:t>Open the trace: one model call, no tools, the </a:t>
+            </a:r>
+            <a:r>
+              <a:rPr sz="1080" i="0" b="0">
+                <a:solidFill>
+                  <a:srgbClr val="0B2E59"/>
+                </a:solidFill>
+                <a:latin typeface="Consolas"/>
+              </a:rPr>
+              <a:t>base</a:t>
+            </a:r>
+            <a:r>
+              <a:rPr sz="1080" i="0" b="0">
                 <a:solidFill>
                   <a:srgbClr val="333333"/>
                 </a:solidFill>
                 <a:latin typeface="Segoe UI"/>
               </a:rPr>
-              <a:t>model-router playground</a:t>
-            </a:r>
-            <a:r>
-              <a:rPr sz="1080" i="0" b="0">
-                <a:solidFill>
-                  <a:srgbClr val="333333"/>
-                </a:solidFill>
-                <a:latin typeface="Segoe UI"/>
-              </a:rPr>
-              <a:t>: the model picked is shown under each answer.</a:t>
+              <a:t> block and the token counts.</a:t>
             </a:r>
           </a:p>
         </p:txBody>
@@ -26293,8 +26241,8 @@
         </p:blipFill>
         <p:spPr>
           <a:xfrm>
-            <a:off x="6583680" y="1628312"/>
-            <a:ext cx="5166360" cy="3363630"/>
+            <a:off x="6583680" y="2175579"/>
+            <a:ext cx="5166360" cy="2269096"/>
           </a:xfrm>
           <a:prstGeom prst="rect">
             <a:avLst/>
@@ -26340,7 +26288,7 @@
                 </a:solidFill>
                 <a:latin typeface="Segoe UI"/>
               </a:rPr>
-              <a:t>The model-router playground prints the model it picked under each answer; the agent trace only shows </a:t>
+              <a:t>One chat span under the agent, no tool calls, and the </a:t>
             </a:r>
             <a:r>
               <a:rPr sz="950" i="1" b="0">
@@ -26349,7 +26297,7 @@
                 </a:solidFill>
                 <a:latin typeface="Consolas"/>
               </a:rPr>
-              <a:t>model-router</a:t>
+              <a:t>base</a:t>
             </a:r>
             <a:r>
               <a:rPr sz="950" i="1" b="0">
@@ -26358,7 +26306,7 @@
                 </a:solidFill>
                 <a:latin typeface="Segoe UI"/>
               </a:rPr>
-              <a:t>.</a:t>
+              <a:t> block as the system message.</a:t>
             </a:r>
           </a:p>
         </p:txBody>
@@ -26424,7 +26372,7 @@
                 </a:solidFill>
                 <a:latin typeface="Segoe UI"/>
               </a:rPr>
-              <a:t> that a Foundry agent starts as model + instructions, and that the router picks a model per request, which you can see under each answer in the model-router playground.</a:t>
+              <a:t> that a Foundry agent starts as model + instructions, and that every answer leaves a trace with the model, the instructions and the token counts.</a:t>
             </a:r>
           </a:p>
         </p:txBody>
@@ -27431,13 +27379,22 @@
               </a:spcAft>
             </a:pPr>
             <a:r>
+              <a:rPr sz="1080" i="0" b="1">
+                <a:solidFill>
+                  <a:srgbClr val="333333"/>
+                </a:solidFill>
+                <a:latin typeface="Segoe UI"/>
+              </a:rPr>
+              <a:t>Parameters</a:t>
+            </a:r>
+            <a:r>
               <a:rPr sz="1080" i="0" b="0">
                 <a:solidFill>
                   <a:srgbClr val="333333"/>
                 </a:solidFill>
                 <a:latin typeface="Segoe UI"/>
               </a:rPr>
-              <a:t>Set </a:t>
+              <a:t> (icon next to Model) → </a:t>
             </a:r>
             <a:r>
               <a:rPr sz="1080" i="0" b="1">
@@ -27446,7 +27403,7 @@
                 </a:solidFill>
                 <a:latin typeface="Segoe UI"/>
               </a:rPr>
-              <a:t>Response format</a:t>
+              <a:t>Text format</a:t>
             </a:r>
             <a:r>
               <a:rPr sz="1080" i="0" b="0">
@@ -27455,7 +27412,7 @@
                 </a:solidFill>
                 <a:latin typeface="Segoe UI"/>
               </a:rPr>
-              <a:t> to JSON schema with </a:t>
+              <a:t> JSON Schema: paste </a:t>
             </a:r>
             <a:r>
               <a:rPr sz="1080" i="0" b="0">
@@ -27473,7 +27430,7 @@
                 </a:solidFill>
                 <a:latin typeface="Segoe UI"/>
               </a:rPr>
-              <a:t>; save a new version.</a:t>
+              <a:t>; save.</a:t>
             </a:r>
           </a:p>
         </p:txBody>
@@ -29041,25 +28998,25 @@
                 </a:solidFill>
                 <a:latin typeface="Segoe UI"/>
               </a:rPr>
-              <a:t> block and save version </a:t>
+              <a:t> block and </a:t>
+            </a:r>
+            <a:r>
+              <a:rPr sz="1080" i="0" b="1">
+                <a:solidFill>
+                  <a:srgbClr val="333333"/>
+                </a:solidFill>
+                <a:latin typeface="Segoe UI"/>
+              </a:rPr>
+              <a:t>Save</a:t>
             </a:r>
             <a:r>
               <a:rPr sz="1080" i="0" b="0">
                 <a:solidFill>
-                  <a:srgbClr val="0B2E59"/>
-                </a:solidFill>
-                <a:latin typeface="Consolas"/>
-              </a:rPr>
-              <a:t>v2-guarded</a:t>
-            </a:r>
-            <a:r>
-              <a:rPr sz="1080" i="0" b="0">
-                <a:solidFill>
                   <a:srgbClr val="333333"/>
                 </a:solidFill>
                 <a:latin typeface="Segoe UI"/>
               </a:rPr>
-              <a:t>.</a:t>
+              <a:t>; note the new version number next to your baseline.</a:t>
             </a:r>
           </a:p>
         </p:txBody>
@@ -31246,25 +31203,25 @@
                 </a:solidFill>
                 <a:latin typeface="Consolas"/>
               </a:rPr>
+              <a:t>gpt-5-mini</a:t>
+            </a:r>
+            <a:r>
+              <a:rPr sz="1100" i="0" b="0">
+                <a:solidFill>
+                  <a:srgbClr val="333333"/>
+                </a:solidFill>
+                <a:latin typeface="Segoe UI"/>
+              </a:rPr>
+              <a:t> vs </a:t>
+            </a:r>
+            <a:r>
+              <a:rPr sz="1100" i="0" b="0">
+                <a:solidFill>
+                  <a:srgbClr val="0B2E59"/>
+                </a:solidFill>
+                <a:latin typeface="Consolas"/>
+              </a:rPr>
               <a:t>gpt-4.1-mini</a:t>
-            </a:r>
-            <a:r>
-              <a:rPr sz="1100" i="0" b="0">
-                <a:solidFill>
-                  <a:srgbClr val="333333"/>
-                </a:solidFill>
-                <a:latin typeface="Segoe UI"/>
-              </a:rPr>
-              <a:t> vs </a:t>
-            </a:r>
-            <a:r>
-              <a:rPr sz="1100" i="0" b="0">
-                <a:solidFill>
-                  <a:srgbClr val="0B2E59"/>
-                </a:solidFill>
-                <a:latin typeface="Consolas"/>
-              </a:rPr>
-              <a:t>model-router</a:t>
             </a:r>
             <a:r>
               <a:rPr sz="1100" i="0" b="0">
